--- a/DISSERTATION/Paris Fashion Show by Slidesgo.pptx
+++ b/DISSERTATION/Paris Fashion Show by Slidesgo.pptx
@@ -277,6 +277,11 @@
       </a:defRPr>
     </a:lvl9pPr>
   </p:defaultTextStyle>
+  <p:extLst>
+    <p:ext uri="{EFAFB233-063F-42B5-8137-9DF3F51BA10A}">
+      <p15:sldGuideLst xmlns:p15="http://schemas.microsoft.com/office/powerpoint/2012/main"/>
+    </p:ext>
+  </p:extLst>
 </p:presentation>
 </file>
 
@@ -6659,8 +6664,8 @@
         </p:nvSpPr>
         <p:spPr>
           <a:xfrm>
-            <a:off x="713225" y="852550"/>
-            <a:ext cx="5229000" cy="2991600"/>
+            <a:off x="713225" y="696420"/>
+            <a:ext cx="5229000" cy="3147730"/>
           </a:xfrm>
           <a:prstGeom prst="rect">
             <a:avLst/>
@@ -23067,7 +23072,11 @@
               <a:buChar char="●"/>
             </a:pPr>
             <a:r>
-              <a:rPr lang="en-GB" dirty="0"/>
+              <a:rPr lang="en-GB" dirty="0">
+                <a:highlight>
+                  <a:srgbClr val="FFFF00"/>
+                </a:highlight>
+              </a:rPr>
               <a:t>Limited data-driven analysis for African fashion collections</a:t>
             </a:r>
           </a:p>
@@ -23086,7 +23095,11 @@
               <a:buChar char="●"/>
             </a:pPr>
             <a:r>
-              <a:rPr lang="en-GB" dirty="0"/>
+              <a:rPr lang="en-GB" dirty="0">
+                <a:highlight>
+                  <a:srgbClr val="FFFF00"/>
+                </a:highlight>
+              </a:rPr>
               <a:t>Designers and marketers lack quantitative insights into colour and fabric trends</a:t>
             </a:r>
           </a:p>
@@ -23105,7 +23118,11 @@
               <a:buChar char="●"/>
             </a:pPr>
             <a:r>
-              <a:rPr lang="en-GB" dirty="0"/>
+              <a:rPr lang="en-GB" dirty="0">
+                <a:highlight>
+                  <a:srgbClr val="FFFF00"/>
+                </a:highlight>
+              </a:rPr>
               <a:t>Runway imagery is large-scale and difficult to analyse manually</a:t>
             </a:r>
           </a:p>
@@ -43701,312 +43718,6 @@
           </a:p>
         </p:txBody>
       </p:sp>
-      <p:sp>
-        <p:nvSpPr>
-          <p:cNvPr id="775" name="Google Shape;775;p41">
-            <a:extLst>
-              <a:ext uri="{FF2B5EF4-FFF2-40B4-BE49-F238E27FC236}">
-                <a16:creationId xmlns:a16="http://schemas.microsoft.com/office/drawing/2014/main" id="{CD53DCC1-206C-FEA6-6467-F44F85DFD62E}"/>
-              </a:ext>
-            </a:extLst>
-          </p:cNvPr>
-          <p:cNvSpPr txBox="1">
-            <a:spLocks noGrp="1"/>
-          </p:cNvSpPr>
-          <p:nvPr>
-            <p:ph type="subTitle" idx="1"/>
-          </p:nvPr>
-        </p:nvSpPr>
-        <p:spPr>
-          <a:xfrm>
-            <a:off x="713250" y="1087471"/>
-            <a:ext cx="4716000" cy="440400"/>
-          </a:xfrm>
-          <a:prstGeom prst="rect">
-            <a:avLst/>
-          </a:prstGeom>
-        </p:spPr>
-        <p:txBody>
-          <a:bodyPr spcFirstLastPara="1" wrap="square" lIns="91425" tIns="91425" rIns="91425" bIns="91425" anchor="b" anchorCtr="0">
-            <a:noAutofit/>
-          </a:bodyPr>
-          <a:lstStyle/>
-          <a:p>
-            <a:pPr marL="0" lvl="0" indent="0" algn="l" rtl="0">
-              <a:spcBef>
-                <a:spcPts val="0"/>
-              </a:spcBef>
-              <a:spcAft>
-                <a:spcPts val="0"/>
-              </a:spcAft>
-              <a:buNone/>
-            </a:pPr>
-            <a:r>
-              <a:rPr lang="en" dirty="0"/>
-              <a:t>ACTORS</a:t>
-            </a:r>
-            <a:endParaRPr dirty="0"/>
-          </a:p>
-        </p:txBody>
-      </p:sp>
-      <p:sp>
-        <p:nvSpPr>
-          <p:cNvPr id="776" name="Google Shape;776;p41">
-            <a:extLst>
-              <a:ext uri="{FF2B5EF4-FFF2-40B4-BE49-F238E27FC236}">
-                <a16:creationId xmlns:a16="http://schemas.microsoft.com/office/drawing/2014/main" id="{5A148CA9-2281-CE05-044C-EA8A86FDEB82}"/>
-              </a:ext>
-            </a:extLst>
-          </p:cNvPr>
-          <p:cNvSpPr txBox="1">
-            <a:spLocks noGrp="1"/>
-          </p:cNvSpPr>
-          <p:nvPr>
-            <p:ph type="subTitle" idx="2"/>
-          </p:nvPr>
-        </p:nvSpPr>
-        <p:spPr>
-          <a:xfrm>
-            <a:off x="713525" y="1527871"/>
-            <a:ext cx="4715400" cy="645300"/>
-          </a:xfrm>
-          <a:prstGeom prst="rect">
-            <a:avLst/>
-          </a:prstGeom>
-        </p:spPr>
-        <p:txBody>
-          <a:bodyPr spcFirstLastPara="1" wrap="square" lIns="91425" tIns="91425" rIns="91425" bIns="91425" anchor="t" anchorCtr="0">
-            <a:noAutofit/>
-          </a:bodyPr>
-          <a:lstStyle/>
-          <a:p>
-            <a:pPr marL="285750" lvl="0" indent="-285750" algn="l" rtl="0">
-              <a:spcBef>
-                <a:spcPts val="0"/>
-              </a:spcBef>
-              <a:spcAft>
-                <a:spcPts val="0"/>
-              </a:spcAft>
-              <a:buFont typeface="Arial" panose="020B0604020202020204" pitchFamily="34" charset="0"/>
-              <a:buChar char="•"/>
-            </a:pPr>
-            <a:r>
-              <a:rPr lang="en-GB" dirty="0"/>
-              <a:t>Fashion researcher</a:t>
-            </a:r>
-          </a:p>
-          <a:p>
-            <a:pPr marL="285750" lvl="0" indent="-285750" algn="l" rtl="0">
-              <a:spcBef>
-                <a:spcPts val="0"/>
-              </a:spcBef>
-              <a:spcAft>
-                <a:spcPts val="0"/>
-              </a:spcAft>
-              <a:buFont typeface="Arial" panose="020B0604020202020204" pitchFamily="34" charset="0"/>
-              <a:buChar char="•"/>
-            </a:pPr>
-            <a:r>
-              <a:rPr lang="en-GB" dirty="0"/>
-              <a:t>Fashion designer</a:t>
-            </a:r>
-          </a:p>
-          <a:p>
-            <a:pPr marL="285750" lvl="0" indent="-285750" algn="l" rtl="0">
-              <a:spcBef>
-                <a:spcPts val="0"/>
-              </a:spcBef>
-              <a:spcAft>
-                <a:spcPts val="0"/>
-              </a:spcAft>
-              <a:buFont typeface="Arial" panose="020B0604020202020204" pitchFamily="34" charset="0"/>
-              <a:buChar char="•"/>
-            </a:pPr>
-            <a:r>
-              <a:rPr lang="en-GB" dirty="0"/>
-              <a:t>Fashion marketer</a:t>
-            </a:r>
-            <a:endParaRPr dirty="0"/>
-          </a:p>
-        </p:txBody>
-      </p:sp>
-      <p:sp>
-        <p:nvSpPr>
-          <p:cNvPr id="777" name="Google Shape;777;p41">
-            <a:extLst>
-              <a:ext uri="{FF2B5EF4-FFF2-40B4-BE49-F238E27FC236}">
-                <a16:creationId xmlns:a16="http://schemas.microsoft.com/office/drawing/2014/main" id="{14577AA6-6BF1-B366-40FC-66E98237717E}"/>
-              </a:ext>
-            </a:extLst>
-          </p:cNvPr>
-          <p:cNvSpPr txBox="1">
-            <a:spLocks noGrp="1"/>
-          </p:cNvSpPr>
-          <p:nvPr>
-            <p:ph type="subTitle" idx="4"/>
-          </p:nvPr>
-        </p:nvSpPr>
-        <p:spPr>
-          <a:xfrm>
-            <a:off x="712925" y="2609498"/>
-            <a:ext cx="4715400" cy="1132323"/>
-          </a:xfrm>
-          <a:prstGeom prst="rect">
-            <a:avLst/>
-          </a:prstGeom>
-        </p:spPr>
-        <p:txBody>
-          <a:bodyPr spcFirstLastPara="1" wrap="square" lIns="91425" tIns="91425" rIns="91425" bIns="91425" anchor="t" anchorCtr="0">
-            <a:noAutofit/>
-          </a:bodyPr>
-          <a:lstStyle/>
-          <a:p>
-            <a:pPr marL="285750" lvl="0" indent="-285750" algn="l" rtl="0">
-              <a:spcBef>
-                <a:spcPts val="0"/>
-              </a:spcBef>
-              <a:spcAft>
-                <a:spcPts val="0"/>
-              </a:spcAft>
-              <a:buFont typeface="Arial" panose="020B0604020202020204" pitchFamily="34" charset="0"/>
-              <a:buChar char="•"/>
-            </a:pPr>
-            <a:r>
-              <a:rPr lang="en-GB" dirty="0"/>
-              <a:t>Analyse colour trends across designers</a:t>
-            </a:r>
-          </a:p>
-          <a:p>
-            <a:pPr marL="285750" lvl="0" indent="-285750" algn="l" rtl="0">
-              <a:spcBef>
-                <a:spcPts val="0"/>
-              </a:spcBef>
-              <a:spcAft>
-                <a:spcPts val="0"/>
-              </a:spcAft>
-              <a:buFont typeface="Arial" panose="020B0604020202020204" pitchFamily="34" charset="0"/>
-              <a:buChar char="•"/>
-            </a:pPr>
-            <a:r>
-              <a:rPr lang="en-GB" dirty="0"/>
-              <a:t>Identify dominant colours in a collection</a:t>
-            </a:r>
-          </a:p>
-          <a:p>
-            <a:pPr marL="285750" lvl="0" indent="-285750" algn="l" rtl="0">
-              <a:spcBef>
-                <a:spcPts val="0"/>
-              </a:spcBef>
-              <a:spcAft>
-                <a:spcPts val="0"/>
-              </a:spcAft>
-              <a:buFont typeface="Arial" panose="020B0604020202020204" pitchFamily="34" charset="0"/>
-              <a:buChar char="•"/>
-            </a:pPr>
-            <a:r>
-              <a:rPr lang="en-GB" dirty="0"/>
-              <a:t>Compare collections</a:t>
-            </a:r>
-          </a:p>
-          <a:p>
-            <a:pPr marL="285750" lvl="0" indent="-285750" algn="l" rtl="0">
-              <a:spcBef>
-                <a:spcPts val="0"/>
-              </a:spcBef>
-              <a:spcAft>
-                <a:spcPts val="0"/>
-              </a:spcAft>
-              <a:buFont typeface="Arial" panose="020B0604020202020204" pitchFamily="34" charset="0"/>
-              <a:buChar char="•"/>
-            </a:pPr>
-            <a:r>
-              <a:rPr lang="en-GB" dirty="0"/>
-              <a:t>Extract runway colour palettes</a:t>
-            </a:r>
-            <a:endParaRPr dirty="0"/>
-          </a:p>
-        </p:txBody>
-      </p:sp>
-      <p:sp>
-        <p:nvSpPr>
-          <p:cNvPr id="778" name="Google Shape;778;p41">
-            <a:extLst>
-              <a:ext uri="{FF2B5EF4-FFF2-40B4-BE49-F238E27FC236}">
-                <a16:creationId xmlns:a16="http://schemas.microsoft.com/office/drawing/2014/main" id="{C2C4095B-D310-F8AB-520C-9FC450CD0296}"/>
-              </a:ext>
-            </a:extLst>
-          </p:cNvPr>
-          <p:cNvSpPr txBox="1">
-            <a:spLocks noGrp="1"/>
-          </p:cNvSpPr>
-          <p:nvPr>
-            <p:ph type="subTitle" idx="3"/>
-          </p:nvPr>
-        </p:nvSpPr>
-        <p:spPr>
-          <a:xfrm>
-            <a:off x="712325" y="2298636"/>
-            <a:ext cx="4716000" cy="440400"/>
-          </a:xfrm>
-          <a:prstGeom prst="rect">
-            <a:avLst/>
-          </a:prstGeom>
-        </p:spPr>
-        <p:txBody>
-          <a:bodyPr spcFirstLastPara="1" wrap="square" lIns="91425" tIns="91425" rIns="91425" bIns="91425" anchor="b" anchorCtr="0">
-            <a:noAutofit/>
-          </a:bodyPr>
-          <a:lstStyle/>
-          <a:p>
-            <a:pPr marL="0" lvl="0" indent="0" algn="l" rtl="0">
-              <a:spcBef>
-                <a:spcPts val="0"/>
-              </a:spcBef>
-              <a:spcAft>
-                <a:spcPts val="0"/>
-              </a:spcAft>
-              <a:buNone/>
-            </a:pPr>
-            <a:r>
-              <a:rPr lang="en" dirty="0"/>
-              <a:t>USE CASES</a:t>
-            </a:r>
-            <a:endParaRPr dirty="0"/>
-          </a:p>
-        </p:txBody>
-      </p:sp>
-      <p:cxnSp>
-        <p:nvCxnSpPr>
-          <p:cNvPr id="779" name="Google Shape;779;p41">
-            <a:extLst>
-              <a:ext uri="{FF2B5EF4-FFF2-40B4-BE49-F238E27FC236}">
-                <a16:creationId xmlns:a16="http://schemas.microsoft.com/office/drawing/2014/main" id="{819BB08A-459A-1C3D-EF16-7FFCE0AF7611}"/>
-              </a:ext>
-            </a:extLst>
-          </p:cNvPr>
-          <p:cNvCxnSpPr/>
-          <p:nvPr/>
-        </p:nvCxnSpPr>
-        <p:spPr>
-          <a:xfrm>
-            <a:off x="712925" y="2258275"/>
-            <a:ext cx="653700" cy="0"/>
-          </a:xfrm>
-          <a:prstGeom prst="straightConnector1">
-            <a:avLst/>
-          </a:prstGeom>
-          <a:noFill/>
-          <a:ln w="38100" cap="flat" cmpd="sng">
-            <a:solidFill>
-              <a:schemeClr val="lt1"/>
-            </a:solidFill>
-            <a:prstDash val="solid"/>
-            <a:round/>
-            <a:headEnd type="none" w="med" len="med"/>
-            <a:tailEnd type="none" w="med" len="med"/>
-          </a:ln>
-        </p:spPr>
-      </p:cxnSp>
       <p:pic>
         <p:nvPicPr>
           <p:cNvPr id="7" name="Picture 6">
@@ -44029,7 +43740,7 @@
         </p:blipFill>
         <p:spPr>
           <a:xfrm>
-            <a:off x="5690721" y="0"/>
+            <a:off x="3428784" y="0"/>
             <a:ext cx="2286431" cy="5143500"/>
           </a:xfrm>
           <a:prstGeom prst="rect">
